--- a/slides-pptx/11-Python_intro-AI-coding.pptx
+++ b/slides-pptx/11-Python_intro-AI-coding.pptx
@@ -277,7 +277,7 @@
           <a:p>
             <a:fld id="{EDB41F16-E846-4287-BC24-E0AC52C6D6DD}" type="datetimeFigureOut">
               <a:rPr lang="nl-BE" smtClean="0"/>
-              <a:t>14/10/2025</a:t>
+              <a:t>1/10/2026</a:t>
             </a:fld>
             <a:endParaRPr lang="nl-BE"/>
           </a:p>
@@ -477,7 +477,7 @@
           <a:p>
             <a:fld id="{EDB41F16-E846-4287-BC24-E0AC52C6D6DD}" type="datetimeFigureOut">
               <a:rPr lang="nl-BE" smtClean="0"/>
-              <a:t>14/10/2025</a:t>
+              <a:t>1/10/2026</a:t>
             </a:fld>
             <a:endParaRPr lang="nl-BE"/>
           </a:p>
@@ -687,7 +687,7 @@
           <a:p>
             <a:fld id="{EDB41F16-E846-4287-BC24-E0AC52C6D6DD}" type="datetimeFigureOut">
               <a:rPr lang="nl-BE" smtClean="0"/>
-              <a:t>14/10/2025</a:t>
+              <a:t>1/10/2026</a:t>
             </a:fld>
             <a:endParaRPr lang="nl-BE"/>
           </a:p>
@@ -887,7 +887,7 @@
           <a:p>
             <a:fld id="{EDB41F16-E846-4287-BC24-E0AC52C6D6DD}" type="datetimeFigureOut">
               <a:rPr lang="nl-BE" smtClean="0"/>
-              <a:t>14/10/2025</a:t>
+              <a:t>1/10/2026</a:t>
             </a:fld>
             <a:endParaRPr lang="nl-BE"/>
           </a:p>
@@ -1163,7 +1163,7 @@
           <a:p>
             <a:fld id="{EDB41F16-E846-4287-BC24-E0AC52C6D6DD}" type="datetimeFigureOut">
               <a:rPr lang="nl-BE" smtClean="0"/>
-              <a:t>14/10/2025</a:t>
+              <a:t>1/10/2026</a:t>
             </a:fld>
             <a:endParaRPr lang="nl-BE"/>
           </a:p>
@@ -1431,7 +1431,7 @@
           <a:p>
             <a:fld id="{EDB41F16-E846-4287-BC24-E0AC52C6D6DD}" type="datetimeFigureOut">
               <a:rPr lang="nl-BE" smtClean="0"/>
-              <a:t>14/10/2025</a:t>
+              <a:t>1/10/2026</a:t>
             </a:fld>
             <a:endParaRPr lang="nl-BE"/>
           </a:p>
@@ -1846,7 +1846,7 @@
           <a:p>
             <a:fld id="{EDB41F16-E846-4287-BC24-E0AC52C6D6DD}" type="datetimeFigureOut">
               <a:rPr lang="nl-BE" smtClean="0"/>
-              <a:t>14/10/2025</a:t>
+              <a:t>1/10/2026</a:t>
             </a:fld>
             <a:endParaRPr lang="nl-BE"/>
           </a:p>
@@ -1988,7 +1988,7 @@
           <a:p>
             <a:fld id="{EDB41F16-E846-4287-BC24-E0AC52C6D6DD}" type="datetimeFigureOut">
               <a:rPr lang="nl-BE" smtClean="0"/>
-              <a:t>14/10/2025</a:t>
+              <a:t>1/10/2026</a:t>
             </a:fld>
             <a:endParaRPr lang="nl-BE"/>
           </a:p>
@@ -2101,7 +2101,7 @@
           <a:p>
             <a:fld id="{EDB41F16-E846-4287-BC24-E0AC52C6D6DD}" type="datetimeFigureOut">
               <a:rPr lang="nl-BE" smtClean="0"/>
-              <a:t>14/10/2025</a:t>
+              <a:t>1/10/2026</a:t>
             </a:fld>
             <a:endParaRPr lang="nl-BE"/>
           </a:p>
@@ -2414,7 +2414,7 @@
           <a:p>
             <a:fld id="{EDB41F16-E846-4287-BC24-E0AC52C6D6DD}" type="datetimeFigureOut">
               <a:rPr lang="nl-BE" smtClean="0"/>
-              <a:t>14/10/2025</a:t>
+              <a:t>1/10/2026</a:t>
             </a:fld>
             <a:endParaRPr lang="nl-BE"/>
           </a:p>
@@ -2703,7 +2703,7 @@
           <a:p>
             <a:fld id="{EDB41F16-E846-4287-BC24-E0AC52C6D6DD}" type="datetimeFigureOut">
               <a:rPr lang="nl-BE" smtClean="0"/>
-              <a:t>14/10/2025</a:t>
+              <a:t>1/10/2026</a:t>
             </a:fld>
             <a:endParaRPr lang="nl-BE"/>
           </a:p>
@@ -2946,7 +2946,7 @@
           <a:p>
             <a:fld id="{EDB41F16-E846-4287-BC24-E0AC52C6D6DD}" type="datetimeFigureOut">
               <a:rPr lang="nl-BE" smtClean="0"/>
-              <a:t>14/10/2025</a:t>
+              <a:t>1/10/2026</a:t>
             </a:fld>
             <a:endParaRPr lang="nl-BE"/>
           </a:p>

--- a/slides-pptx/11-Python_intro-AI-coding.pptx
+++ b/slides-pptx/11-Python_intro-AI-coding.pptx
@@ -277,7 +277,7 @@
           <a:p>
             <a:fld id="{EDB41F16-E846-4287-BC24-E0AC52C6D6DD}" type="datetimeFigureOut">
               <a:rPr lang="nl-BE" smtClean="0"/>
-              <a:t>1/10/2026</a:t>
+              <a:t>6/10/2026</a:t>
             </a:fld>
             <a:endParaRPr lang="nl-BE"/>
           </a:p>
@@ -477,7 +477,7 @@
           <a:p>
             <a:fld id="{EDB41F16-E846-4287-BC24-E0AC52C6D6DD}" type="datetimeFigureOut">
               <a:rPr lang="nl-BE" smtClean="0"/>
-              <a:t>1/10/2026</a:t>
+              <a:t>6/10/2026</a:t>
             </a:fld>
             <a:endParaRPr lang="nl-BE"/>
           </a:p>
@@ -687,7 +687,7 @@
           <a:p>
             <a:fld id="{EDB41F16-E846-4287-BC24-E0AC52C6D6DD}" type="datetimeFigureOut">
               <a:rPr lang="nl-BE" smtClean="0"/>
-              <a:t>1/10/2026</a:t>
+              <a:t>6/10/2026</a:t>
             </a:fld>
             <a:endParaRPr lang="nl-BE"/>
           </a:p>
@@ -887,7 +887,7 @@
           <a:p>
             <a:fld id="{EDB41F16-E846-4287-BC24-E0AC52C6D6DD}" type="datetimeFigureOut">
               <a:rPr lang="nl-BE" smtClean="0"/>
-              <a:t>1/10/2026</a:t>
+              <a:t>6/10/2026</a:t>
             </a:fld>
             <a:endParaRPr lang="nl-BE"/>
           </a:p>
@@ -1163,7 +1163,7 @@
           <a:p>
             <a:fld id="{EDB41F16-E846-4287-BC24-E0AC52C6D6DD}" type="datetimeFigureOut">
               <a:rPr lang="nl-BE" smtClean="0"/>
-              <a:t>1/10/2026</a:t>
+              <a:t>6/10/2026</a:t>
             </a:fld>
             <a:endParaRPr lang="nl-BE"/>
           </a:p>
@@ -1431,7 +1431,7 @@
           <a:p>
             <a:fld id="{EDB41F16-E846-4287-BC24-E0AC52C6D6DD}" type="datetimeFigureOut">
               <a:rPr lang="nl-BE" smtClean="0"/>
-              <a:t>1/10/2026</a:t>
+              <a:t>6/10/2026</a:t>
             </a:fld>
             <a:endParaRPr lang="nl-BE"/>
           </a:p>
@@ -1846,7 +1846,7 @@
           <a:p>
             <a:fld id="{EDB41F16-E846-4287-BC24-E0AC52C6D6DD}" type="datetimeFigureOut">
               <a:rPr lang="nl-BE" smtClean="0"/>
-              <a:t>1/10/2026</a:t>
+              <a:t>6/10/2026</a:t>
             </a:fld>
             <a:endParaRPr lang="nl-BE"/>
           </a:p>
@@ -1988,7 +1988,7 @@
           <a:p>
             <a:fld id="{EDB41F16-E846-4287-BC24-E0AC52C6D6DD}" type="datetimeFigureOut">
               <a:rPr lang="nl-BE" smtClean="0"/>
-              <a:t>1/10/2026</a:t>
+              <a:t>6/10/2026</a:t>
             </a:fld>
             <a:endParaRPr lang="nl-BE"/>
           </a:p>
@@ -2101,7 +2101,7 @@
           <a:p>
             <a:fld id="{EDB41F16-E846-4287-BC24-E0AC52C6D6DD}" type="datetimeFigureOut">
               <a:rPr lang="nl-BE" smtClean="0"/>
-              <a:t>1/10/2026</a:t>
+              <a:t>6/10/2026</a:t>
             </a:fld>
             <a:endParaRPr lang="nl-BE"/>
           </a:p>
@@ -2414,7 +2414,7 @@
           <a:p>
             <a:fld id="{EDB41F16-E846-4287-BC24-E0AC52C6D6DD}" type="datetimeFigureOut">
               <a:rPr lang="nl-BE" smtClean="0"/>
-              <a:t>1/10/2026</a:t>
+              <a:t>6/10/2026</a:t>
             </a:fld>
             <a:endParaRPr lang="nl-BE"/>
           </a:p>
@@ -2703,7 +2703,7 @@
           <a:p>
             <a:fld id="{EDB41F16-E846-4287-BC24-E0AC52C6D6DD}" type="datetimeFigureOut">
               <a:rPr lang="nl-BE" smtClean="0"/>
-              <a:t>1/10/2026</a:t>
+              <a:t>6/10/2026</a:t>
             </a:fld>
             <a:endParaRPr lang="nl-BE"/>
           </a:p>
@@ -2946,7 +2946,7 @@
           <a:p>
             <a:fld id="{EDB41F16-E846-4287-BC24-E0AC52C6D6DD}" type="datetimeFigureOut">
               <a:rPr lang="nl-BE" smtClean="0"/>
-              <a:t>1/10/2026</a:t>
+              <a:t>6/10/2026</a:t>
             </a:fld>
             <a:endParaRPr lang="nl-BE"/>
           </a:p>
@@ -3982,7 +3982,7 @@
         <p:spPr>
           <a:xfrm>
             <a:off x="838200" y="1825625"/>
-            <a:ext cx="10515600" cy="4351338"/>
+            <a:ext cx="10515600" cy="3040289"/>
           </a:xfrm>
         </p:spPr>
         <p:txBody>
@@ -4001,7 +4001,7 @@
             </a:r>
             <a:r>
               <a:rPr lang="en-US" dirty="0"/>
-              <a:t> parties. E.g.:</a:t>
+              <a:t> parties.</a:t>
             </a:r>
           </a:p>
           <a:p>
@@ -4025,11 +4025,7 @@
           <a:p>
             <a:r>
               <a:rPr lang="en-US" dirty="0"/>
-              <a:t>Writing unit tests (strongly relevant to capture </a:t>
-            </a:r>
-            <a:r>
-              <a:rPr lang="en-US"/>
-              <a:t>possible mistakes)</a:t>
+              <a:t>Writing unit tests (strongly relevant to capture possible mistakes)</a:t>
             </a:r>
           </a:p>
           <a:p>
@@ -5339,7 +5335,7 @@
             </a:pPr>
             <a:r>
               <a:rPr lang="en-US" dirty="0"/>
-              <a:t>Some inspirations:</a:t>
+              <a:t>Some inspirations for a prompt:</a:t>
             </a:r>
           </a:p>
           <a:p>
